--- a/Useful_material/Excercises_in_Finnish.pptx
+++ b/Useful_material/Excercises_in_Finnish.pptx
@@ -181,18 +181,18 @@
   <pc:docChgLst>
     <pc:chgData name="Miika S Mäki" userId="0607e178-1540-43e7-97f4-ff67750a6258" providerId="ADAL" clId="{79E1FF66-8589-4620-A62E-29F7E28CA5A5}"/>
     <pc:docChg chg="undo custSel modSld">
-      <pc:chgData name="Miika S Mäki" userId="0607e178-1540-43e7-97f4-ff67750a6258" providerId="ADAL" clId="{79E1FF66-8589-4620-A62E-29F7E28CA5A5}" dt="2019-12-11T13:38:04.202" v="508" actId="20577"/>
+      <pc:chgData name="Miika S Mäki" userId="0607e178-1540-43e7-97f4-ff67750a6258" providerId="ADAL" clId="{79E1FF66-8589-4620-A62E-29F7E28CA5A5}" dt="2019-12-11T14:18:49.297" v="510" actId="20577"/>
       <pc:docMkLst>
         <pc:docMk/>
       </pc:docMkLst>
       <pc:sldChg chg="modSp">
-        <pc:chgData name="Miika S Mäki" userId="0607e178-1540-43e7-97f4-ff67750a6258" providerId="ADAL" clId="{79E1FF66-8589-4620-A62E-29F7E28CA5A5}" dt="2019-12-11T13:31:41.040" v="121" actId="20577"/>
+        <pc:chgData name="Miika S Mäki" userId="0607e178-1540-43e7-97f4-ff67750a6258" providerId="ADAL" clId="{79E1FF66-8589-4620-A62E-29F7E28CA5A5}" dt="2019-12-11T14:18:49.297" v="510" actId="20577"/>
         <pc:sldMkLst>
           <pc:docMk/>
           <pc:sldMk cId="4107540065" sldId="256"/>
         </pc:sldMkLst>
         <pc:spChg chg="mod">
-          <ac:chgData name="Miika S Mäki" userId="0607e178-1540-43e7-97f4-ff67750a6258" providerId="ADAL" clId="{79E1FF66-8589-4620-A62E-29F7E28CA5A5}" dt="2019-12-11T13:31:41.040" v="121" actId="20577"/>
+          <ac:chgData name="Miika S Mäki" userId="0607e178-1540-43e7-97f4-ff67750a6258" providerId="ADAL" clId="{79E1FF66-8589-4620-A62E-29F7E28CA5A5}" dt="2019-12-11T14:18:49.297" v="510" actId="20577"/>
           <ac:spMkLst>
             <pc:docMk/>
             <pc:sldMk cId="4107540065" sldId="256"/>
@@ -4036,8 +4036,8 @@
               <a:t>Valitse</a:t>
             </a:r>
             <a:r>
-              <a:rPr lang="en-US" dirty="0"/>
-              <a:t> 0-5 </a:t>
+              <a:rPr lang="en-US"/>
+              <a:t> 0-4 </a:t>
             </a:r>
             <a:r>
               <a:rPr lang="en-US" dirty="0" err="1"/>
@@ -5341,10 +5341,9 @@
               <a:t>firefox</a:t>
             </a:r>
             <a:r>
-              <a:rPr lang="en-US"/>
+              <a:rPr lang="en-US" dirty="0"/>
               <a:t>.</a:t>
             </a:r>
-            <a:endParaRPr lang="en-US" dirty="0"/>
           </a:p>
           <a:p>
             <a:endParaRPr lang="en-US" dirty="0"/>
